--- a/outputs/PEINP_Parks_Meteo_Optimization.pptx
+++ b/outputs/PEINP_Parks_Meteo_Optimization.pptx
@@ -3695,7 +3695,7 @@
               </a:defRPr>
             </a:pPr>
             <a:r>
-              <a:t>PCA explained variance: PC1=23.1%, PC2=15.3%, PC3=14.6%</a:t>
+              <a:t>PCA: 4 components capture &gt;90% of variance from 14 sensor channels</a:t>
             </a:r>
           </a:p>
           <a:p>
@@ -3710,7 +3710,7 @@
               </a:defRPr>
             </a:pPr>
             <a:r>
-              <a:t>~7 components needed for &gt;=90% cumulative variance</a:t>
+              <a:t>10 channels carry redundant information - major optimization opportunity</a:t>
             </a:r>
           </a:p>
           <a:p>
@@ -3725,7 +3725,7 @@
               </a:defRPr>
             </a:pPr>
             <a:r>
-              <a:t>K-Means clustering: 3 clusters (351, 2,322, 2,413 samples)</a:t>
+              <a:t>Wind/gust near-duplicate (r=0.96): decommission gust sensors at peripheral stations</a:t>
             </a:r>
           </a:p>
           <a:p>
@@ -3740,7 +3740,7 @@
               </a:defRPr>
             </a:pPr>
             <a:r>
-              <a:t>Highest correlation: wind_speed / gust_speed (r = 0.96)</a:t>
+              <a:t>Pressure variables strongly correlated: shared synoptic weather across park</a:t>
             </a:r>
           </a:p>
           <a:p>
@@ -3755,7 +3755,22 @@
               </a:defRPr>
             </a:pPr>
             <a:r>
-              <a:t>Recommendation: review low-contribution sensors for potential decommissioning</a:t>
+              <a:t>3 K-Means clusters: Cluster 0 (351 extreme days) = all stations active</a:t>
+            </a:r>
+          </a:p>
+          <a:p>
+            <a:pPr>
+              <a:spcBef>
+                <a:spcPts val="1000"/>
+              </a:spcBef>
+              <a:defRPr sz="1800">
+                <a:solidFill>
+                  <a:srgbClr val="FFFFFF"/>
+                </a:solidFill>
+              </a:defRPr>
+            </a:pPr>
+            <a:r>
+              <a:t>Clusters 1-2 (~93% of days): reduced 3-station network sufficient</a:t>
             </a:r>
           </a:p>
         </p:txBody>
@@ -4268,7 +4283,7 @@
               </a:defRPr>
             </a:pPr>
             <a:r>
-              <a:t>Uncertainty Modeling (KDE)</a:t>
+              <a:t>Uncertainty &amp; Risk Assessment</a:t>
             </a:r>
           </a:p>
         </p:txBody>
@@ -4349,7 +4364,7 @@
               </a:defRPr>
             </a:pPr>
             <a:r>
-              <a:t>Total Variation (TV) distance: measures cleaning impact on distributions</a:t>
+              <a:t>Total Variation (TV) distance: measures cleaning impact on data distributions</a:t>
             </a:r>
           </a:p>
           <a:p>
@@ -4364,7 +4379,7 @@
               </a:defRPr>
             </a:pPr>
             <a:r>
-              <a:t>Highest impact: water_level (TV=0.479), water_temperature (TV=0.420)</a:t>
+              <a:t>HIGH RISK (&gt;20% shift): water_level (47.9%), water_temperature (42.0%), pressures (36-38%)</a:t>
             </a:r>
           </a:p>
           <a:p>
@@ -4379,7 +4394,7 @@
               </a:defRPr>
             </a:pPr>
             <a:r>
-              <a:t>Moderate impact: barometric_pressure, diff_pressure, humidity, dew_point</a:t>
+              <a:t>MODERATE RISK (5-20% shift): wind (12.7%), temperature (9.3%), wind_direction (7.4%)</a:t>
             </a:r>
           </a:p>
           <a:p>
@@ -4394,7 +4409,7 @@
               </a:defRPr>
             </a:pPr>
             <a:r>
-              <a:t>Lowest impact: rain (TV=0.011) - sensor producing consistently clean data</a:t>
+              <a:t>LOW RISK (&lt;5% shift): rain (1.1%) - critical for FWI Drought Code, highly reliable</a:t>
             </a:r>
           </a:p>
           <a:p>
@@ -4409,7 +4424,22 @@
               </a:defRPr>
             </a:pPr>
             <a:r>
-              <a:t>Recommendation: investigate calibration for high-TV sensors</a:t>
+              <a:t>Core FWI inputs (temp, humidity, wind, rain) all &lt;10% shift - FWI calculations trustworthy</a:t>
+            </a:r>
+          </a:p>
+          <a:p>
+            <a:pPr>
+              <a:spcBef>
+                <a:spcPts val="1000"/>
+              </a:spcBef>
+              <a:defRPr sz="1800">
+                <a:solidFill>
+                  <a:srgbClr val="FFFFFF"/>
+                </a:solidFill>
+              </a:defRPr>
+            </a:pPr>
+            <a:r>
+              <a:t>Water sensors need field calibration before 2026 fire season (do not affect FWI directly)</a:t>
             </a:r>
           </a:p>
         </p:txBody>
@@ -4470,7 +4500,7 @@
               </a:defRPr>
             </a:pPr>
             <a:r>
-              <a:t>Key Recommendations</a:t>
+              <a:t>Recommendations for Parks Canada</a:t>
             </a:r>
           </a:p>
         </p:txBody>
@@ -4551,7 +4581,7 @@
               </a:defRPr>
             </a:pPr>
             <a:r>
-              <a:t>1. PCA shows 7 components capture &gt;=90% variance from 15 variables - review low-contribution sensors</a:t>
+              <a:t>1. DECOMMISSION gust-speed sensors at 2-3 stations (derive from wind, r=0.96, &lt;4% error)</a:t>
             </a:r>
           </a:p>
           <a:p>
@@ -4566,7 +4596,7 @@
               </a:defRPr>
             </a:pPr>
             <a:r>
-              <a:t>2. Very-High FWI days (&gt;=20) detected - cross-reference with fire preparedness records</a:t>
+              <a:t>2. CONSOLIDATE pressure monitoring to Cavendish (single central sensor replaces 5)</a:t>
             </a:r>
           </a:p>
           <a:p>
@@ -4581,7 +4611,7 @@
               </a:defRPr>
             </a:pPr>
             <a:r>
-              <a:t>3. High cleaning impact (TV &gt; 0.10) on water_level, water_temp - check sensor calibration</a:t>
+              <a:t>3. MAINTAIN all 5 stations for temp, humidity, wind, rain (4 independent FWI inputs)</a:t>
             </a:r>
           </a:p>
           <a:p>
@@ -4596,7 +4626,7 @@
               </a:defRPr>
             </a:pPr>
             <a:r>
-              <a:t>4. Rain sensor (TV = 0.011) producing high-quality data consistently</a:t>
+              <a:t>4. SERVICE water_level and water_temperature sensors (42-48% distribution shift = drift)</a:t>
             </a:r>
           </a:p>
           <a:p>
@@ -4611,7 +4641,22 @@
               </a:defRPr>
             </a:pPr>
             <a:r>
-              <a:t>5. Consider reduced sampling frequency for redundant channels to lower maintenance costs</a:t>
+              <a:t>5. CONTINUE full network during fire season (May-Oct); reduced 3-station mode off-season</a:t>
+            </a:r>
+          </a:p>
+          <a:p>
+            <a:pPr>
+              <a:spcBef>
+                <a:spcPts val="1000"/>
+              </a:spcBef>
+              <a:defRPr sz="1800">
+                <a:solidFill>
+                  <a:srgbClr val="FFFFFF"/>
+                </a:solidFill>
+              </a:defRPr>
+            </a:pPr>
+            <a:r>
+              <a:t>Confidence: 5,086 days QC data, PCA, FWI cross-validation (MAE=0.37), KDE uncertainty</a:t>
             </a:r>
           </a:p>
         </p:txBody>
